--- a/CostVision-Rate-Card-Upload.pptx
+++ b/CostVision-Rate-Card-Upload.pptx
@@ -5337,7 +5337,7 @@
             <a:r>
               <a:rPr sz="1000" b="1" i="0">
                 <a:solidFill>
-                  <a:srgbClr val="6B7280"/>
+                  <a:srgbClr val="686F7D"/>
                 </a:solidFill>
                 <a:latin typeface="Calibri"/>
               </a:rPr>
@@ -5431,7 +5431,7 @@
             <a:avLst/>
           </a:prstGeom>
           <a:solidFill>
-            <a:srgbClr val="2E8B57"/>
+            <a:srgbClr val="2A7F50"/>
           </a:solidFill>
           <a:ln>
             <a:noFill/>
@@ -5493,7 +5493,7 @@
             <a:r>
               <a:rPr sz="1250" b="1" i="0">
                 <a:solidFill>
-                  <a:srgbClr val="2E8B57"/>
+                  <a:srgbClr val="2A7F50"/>
                 </a:solidFill>
                 <a:latin typeface="Calibri"/>
               </a:rPr>
@@ -5736,7 +5736,7 @@
             <a:r>
               <a:rPr sz="1040" b="0" i="0">
                 <a:solidFill>
-                  <a:srgbClr val="6B7280"/>
+                  <a:srgbClr val="686F7D"/>
                 </a:solidFill>
                 <a:latin typeface="Calibri"/>
               </a:rPr>
@@ -5862,7 +5862,7 @@
             <a:r>
               <a:rPr sz="1040" b="0" i="0">
                 <a:solidFill>
-                  <a:srgbClr val="6B7280"/>
+                  <a:srgbClr val="686F7D"/>
                 </a:solidFill>
                 <a:latin typeface="Calibri"/>
               </a:rPr>
@@ -5988,7 +5988,7 @@
             <a:r>
               <a:rPr sz="1040" b="0" i="0">
                 <a:solidFill>
-                  <a:srgbClr val="6B7280"/>
+                  <a:srgbClr val="686F7D"/>
                 </a:solidFill>
                 <a:latin typeface="Calibri"/>
               </a:rPr>
@@ -6242,7 +6242,7 @@
             <a:r>
               <a:rPr sz="940" b="0" i="1">
                 <a:solidFill>
-                  <a:srgbClr val="6B7280"/>
+                  <a:srgbClr val="686F7D"/>
                 </a:solidFill>
                 <a:latin typeface="Calibri"/>
               </a:rPr>
@@ -6440,7 +6440,7 @@
             <a:avLst/>
           </a:prstGeom>
           <a:solidFill>
-            <a:srgbClr val="B7791F"/>
+            <a:srgbClr val="99651A"/>
           </a:solidFill>
           <a:ln>
             <a:noFill/>
@@ -6502,7 +6502,7 @@
             <a:r>
               <a:rPr sz="1150" b="1" i="0">
                 <a:solidFill>
-                  <a:srgbClr val="B7791F"/>
+                  <a:srgbClr val="99651A"/>
                 </a:solidFill>
                 <a:latin typeface="Calibri"/>
               </a:rPr>

--- a/CostVision-Rate-Card-Upload.pptx
+++ b/CostVision-Rate-Card-Upload.pptx
@@ -505,43 +505,37 @@
           <a:lstStyle/>
           <a:p>
             <a:r>
-              <a:t>This is the slide for the IT team, and the short version is that it is one Excel file and two clicks. I will walk the five boxes along the top, and then show you that it actually does what it says.</a:t>
+              <a:t>This slide is for IT. The short version: one Excel file, uploaded by an admin.</a:t>
             </a:r>
           </a:p>
           <a:p/>
           <a:p>
             <a:r>
-              <a:t>First, who. The buttons on that screen only appear for an admin, and more importantly the check is done on the server, not in the browser — so hiding a button is not the security. We tried it: an ordinary signed-in user calling the upload directly gets refused, and the same call from an admin account goes through. Admins are named in the server settings, so you decide who they are, and the role is read fresh every time rather than being baked into the login token. Take someone's admin off and it takes effect on their next click.</a:t>
+              <a:t>First, who. Only an admin sees these buttons, and the check is on the server, not in the browser. We tried it. An ordinary user calling the upload directly is refused. Admins are named in the server settings, so you decide who they are.</a:t>
             </a:r>
           </a:p>
           <a:p/>
           <a:p>
             <a:r>
-              <a:t>Second, the file. You press Download Excel template and you get a workbook with every rate the tool uses, already filled in with what it currently has — so you are editing a real sheet, not filling in a blank one. Material prices per kilo, labour rates per hour, the machine build-ups, energy, exchange rates and the overhead defaults. You put our numbers in the same columns and upload it. It is checked as it loads — if a column is missing or a number is not a number, the whole file is rejected rather than half-loaded, because half a rate book is worse than none.</a:t>
+              <a:t>Second, the file. You download a template filled with the built-in rates, and put ours in. Or, easier, you paste JLR's own rate card into the Rate Converter workbook. It maps JLR's codes to the tool's, with plain formulas and no macros. The file is checked as it loads. If anything is wrong, the whole file is rejected, not half-loaded. Uploading it switches the tool to our rates, and one click puts the built-in rates back.</a:t>
             </a:r>
           </a:p>
           <a:p/>
           <a:p>
             <a:r>
-              <a:t>The upload we did loaded three hundred and twenty-eight materials, a hundred and seventy-eight machines and forty-two labour grades. Then one click switches the tool over to it, and one click puts it back.</a:t>
+              <a:t>On the right is the same bracket, costed twice with the same answers. Only the rates changed. Material, labour and machine time moved. Packaging, logistics and tooling did not, because the sheet does not touch them.</a:t>
             </a:r>
           </a:p>
           <a:p/>
           <a:p>
             <a:r>
-              <a:t>Now the part I would want to see if I were you. The panel on the right is the same bracket costed twice, with the same answers, changing nothing except which rate book is switched on. Thirty-three pounds nineteen on the built-in rates, seventy pounds sixty on ours. Material more than doubles, labour triples, machine time goes up. And look at what did not move — packaging, logistics and tooling are unchanged, because nothing in the sheet touches them. That is the tool reading our file rather than a number being nudged somewhere.</a:t>
+              <a:t>Last, audit. Each rate book gets an ID from its contents, and old books are kept. So a past costing can be rerun on the rates it used.</a:t>
             </a:r>
           </a:p>
           <a:p/>
           <a:p>
             <a:r>
-              <a:t>Last thing, and it matters for audit. Each sheet gets an ID worked out from its own contents, and every costing records which one it used. So a report from months ago can be traced back to the exact rates behind it, and if someone asks why two costings of the same part differ, the answer is in the record rather than in somebody's memory.</a:t>
-            </a:r>
-          </a:p>
-          <a:p/>
-          <a:p>
-            <a:r>
-              <a:t>If nobody ever uploads anything, nothing breaks — the tool keeps using its own rates and says so on every run. It is never guessing about which numbers it is on.</a:t>
+              <a:t>If nobody uploads anything, nothing breaks. The tool keeps its built-in rates.</a:t>
             </a:r>
           </a:p>
         </p:txBody>
@@ -4405,7 +4399,7 @@
                 </a:solidFill>
                 <a:latin typeface="Calibri"/>
               </a:rPr>
-              <a:t>with the current values.</a:t>
+              <a:t>with the built-in values.</a:t>
             </a:r>
           </a:p>
         </p:txBody>
@@ -4665,7 +4659,7 @@
                 </a:solidFill>
                 <a:latin typeface="Calibri"/>
               </a:rPr>
-              <a:t>Material £/kg, labour £/hr,</a:t>
+              <a:t>Type them in, or paste</a:t>
             </a:r>
           </a:p>
           <a:p>
@@ -4684,7 +4678,7 @@
                 </a:solidFill>
                 <a:latin typeface="Calibri"/>
               </a:rPr>
-              <a:t>machine build-ups, energy,</a:t>
+              <a:t>JLR's card into the Rate</a:t>
             </a:r>
           </a:p>
           <a:p>
@@ -4703,7 +4697,7 @@
                 </a:solidFill>
                 <a:latin typeface="Calibri"/>
               </a:rPr>
-              <a:t>FX, overhead.</a:t>
+              <a:t>Converter. No macros.</a:t>
             </a:r>
           </a:p>
         </p:txBody>
@@ -5219,7 +5213,7 @@
                 </a:solidFill>
                 <a:latin typeface="Calibri"/>
               </a:rPr>
-              <a:t>Switch it on</a:t>
+              <a:t>It goes live</a:t>
             </a:r>
           </a:p>
         </p:txBody>
@@ -5261,7 +5255,7 @@
                 </a:solidFill>
                 <a:latin typeface="Calibri"/>
               </a:rPr>
-              <a:t>One click. The tool now</a:t>
+              <a:t>The upload switches the</a:t>
             </a:r>
           </a:p>
           <a:p>
@@ -5280,7 +5274,7 @@
                 </a:solidFill>
                 <a:latin typeface="Calibri"/>
               </a:rPr>
-              <a:t>reads our book. One more</a:t>
+              <a:t>tool to our rates. One</a:t>
             </a:r>
           </a:p>
           <a:p>
@@ -5299,7 +5293,7 @@
                 </a:solidFill>
                 <a:latin typeface="Calibri"/>
               </a:rPr>
-              <a:t>puts it back.</a:t>
+              <a:t>click puts it back.</a:t>
             </a:r>
           </a:p>
         </p:txBody>
@@ -6246,7 +6240,7 @@
                 </a:solidFill>
                 <a:latin typeface="Calibri"/>
               </a:rPr>
-              <a:t>Only the buckets a rate feeds moved. Packaging, logistics and tooling did not — nothing in the sheet touches them.</a:t>
+              <a:t>Packaging, logistics and tooling did not move.</a:t>
             </a:r>
           </a:p>
         </p:txBody>
@@ -6332,7 +6326,7 @@
                 </a:solidFill>
                 <a:latin typeface="Calibri"/>
               </a:rPr>
-              <a:t>Every costing records which book it used</a:t>
+              <a:t>Every rate book is kept, with its own ID</a:t>
             </a:r>
           </a:p>
         </p:txBody>
@@ -6374,7 +6368,7 @@
                 </a:solidFill>
                 <a:latin typeface="Calibri"/>
               </a:rPr>
-              <a:t>Each sheet gets an ID from its own contents — ours is 93d84eb6, the built-in one 1398b5ef. A report months old can be traced back to the exact rates behind it.</a:t>
+              <a:t>Ours is 93d84eb6, built-in is 1398b5ef. Old books are kept, so a past costing can be rerun on its rates.</a:t>
             </a:r>
           </a:p>
         </p:txBody>
@@ -6548,7 +6542,7 @@
                 </a:solidFill>
                 <a:latin typeface="Calibri"/>
               </a:rPr>
-              <a:t>Admins are named in the server settings, and the check is done on the server, not in the browser. With no sheet uploaded the tool keeps using its own rates and says so on every run.</a:t>
+              <a:t>Admins are named in the server settings, and the check is done on the server, not in the browser. With no sheet uploaded the tool keeps its built-in rates, and the panel shows which set is active.</a:t>
             </a:r>
           </a:p>
         </p:txBody>
